--- a/PARA/G7_Presentacion_PARA_SCA.pptx
+++ b/PARA/G7_Presentacion_PARA_SCA.pptx
@@ -118,50 +118,50 @@
   <p:extLst>
     <p:ext uri="{521415D9-36F7-43E2-AB2F-B90AF26B5E84}">
       <p14:sectionLst xmlns:p14="http://schemas.microsoft.com/office/powerpoint/2010/main">
-        <p14:section name="Inicio" id="{f96e6b54-0c2d-02ae-f5f3-653cfe2b792a}">
+        <p14:section name="Inicio" id="{3347a6b8-f722-d6ff-a38a-16a4f358c2cb}">
           <p14:sldIdLst>
             <p14:sldId id="256"/>
           </p14:sldIdLst>
         </p14:section>
-        <p14:section name="Proyecto" id="{6fc46f92-f72b-d31a-b6a9-fa463ee72af9}">
+        <p14:section name="Proyecto" id="{118c7811-633a-dc2a-3879-8f8b3384b3d4}">
           <p14:sldIdLst>
             <p14:sldId id="257"/>
           </p14:sldIdLst>
         </p14:section>
-        <p14:section name="Planificación" id="{aeb3ac27-dd29-7689-07a0-db354dad9154}">
+        <p14:section name="Planificación" id="{dc355a39-ce08-6285-4d76-e9414b064b28}">
           <p14:sldIdLst>
             <p14:sldId id="258"/>
           </p14:sldIdLst>
         </p14:section>
-        <p14:section name="Investigación" id="{e3a46198-908c-bd3e-212a-f8e2f2bb8740}">
+        <p14:section name="Investigación" id="{ee58edd2-1f37-6c31-76c9-ed0a8fe4bd65}">
           <p14:sldIdLst>
             <p14:sldId id="259"/>
             <p14:sldId id="260"/>
           </p14:sldIdLst>
         </p14:section>
-        <p14:section name="Asistente GEM" id="{1408f86d-c24d-b22c-f827-bb8349a358fb}">
+        <p14:section name="Asistente GEM" id="{2a955fcc-bd1d-6724-5ff0-c841305db174}">
           <p14:sldIdLst>
             <p14:sldId id="261"/>
             <p14:sldId id="262"/>
           </p14:sldIdLst>
         </p14:section>
-        <p14:section name="Prototipo" id="{ad578e0a-4c60-e920-f592-7689108afd5d}">
+        <p14:section name="Prototipo" id="{cd4873a2-ad79-56ab-e2b2-0d1f08135d01}">
           <p14:sldIdLst>
             <p14:sldId id="263"/>
           </p14:sldIdLst>
         </p14:section>
-        <p14:section name="Piezas visuales" id="{bbbd4626-ce6f-54e2-f9cd-49fd73bdaf92}">
+        <p14:section name="Piezas visuales" id="{c429d27a-4043-a26c-a3b2-ff4ae7dc74ed}">
           <p14:sldIdLst>
             <p14:sldId id="264"/>
           </p14:sldIdLst>
         </p14:section>
-        <p14:section name="Notion" id="{f38f077f-89e4-8aa3-2640-78cf19b3f03a}">
+        <p14:section name="Notion" id="{9240a07e-36ca-7e53-2c10-22d4a322e3ec}">
           <p14:sldIdLst>
             <p14:sldId id="265"/>
             <p14:sldId id="266"/>
           </p14:sldIdLst>
         </p14:section>
-        <p14:section name="Cierre" id="{579706e0-73b1-f9b1-9bcf-4211ef5f1e3a}">
+        <p14:section name="Cierre" id="{38cd186f-95bf-1079-e789-fec5f5881a04}">
           <p14:sldIdLst>
             <p14:sldId id="267"/>
           </p14:sldIdLst>
@@ -4935,7 +4935,7 @@
                   <a:schemeClr val="tx1"/>
                 </a:solidFill>
               </a:rPr>
-              <a:t>Analizar y diseñar el sistema web de asistencia de RBG: marcaciones, QR, acceso y reportes</a:t>
+              <a:t>Analizar y diseñar todo el SCA web de RBG: 9 módulos y 6 actores del SRS_RBG_V4</a:t>
             </a:r>
             <a:endParaRPr lang="en-US" sz="1300" dirty="0"/>
           </a:p>
@@ -5095,7 +5095,7 @@
                   <a:schemeClr val="tx1"/>
                 </a:solidFill>
               </a:rPr>
-              <a:t>4 casos de uso con matriz RF-CU, clases y secuencias, y lista IREB de 17 preguntas</a:t>
+              <a:t>9 casos de uso con trazabilidad a 47 RF y 36 RNF, clases y secuencias, y lista IREB de 17 preguntas</a:t>
             </a:r>
             <a:endParaRPr lang="en-US" sz="1300" dirty="0"/>
           </a:p>
@@ -5255,7 +5255,7 @@
                   <a:schemeClr val="tx1"/>
                 </a:solidFill>
               </a:rPr>
-              <a:t>Con el SRS, las guías de PlantUML y las herramientas de la materia</a:t>
+              <a:t>Con el SRS, las guías de PlantUML y las herramientas de la materia, por sprints entre 3 integrantes</a:t>
             </a:r>
             <a:endParaRPr lang="en-US" sz="1300" dirty="0"/>
           </a:p>
@@ -5415,7 +5415,7 @@
                   <a:schemeClr val="tx1"/>
                 </a:solidFill>
               </a:rPr>
-              <a:t>Mejora el registro de asistencia y el cálculo de horas del personal de obra</a:t>
+              <a:t>Reemplaza fotos y WhatsApp por un registro central y facilita el cálculo de horas</a:t>
             </a:r>
             <a:endParaRPr lang="en-US" sz="1300" dirty="0"/>
           </a:p>
@@ -5575,7 +5575,7 @@
                   <a:schemeClr val="tx1"/>
                 </a:solidFill>
               </a:rPr>
-              <a:t>Entregas de la Unidad 1 hasta el 27 de octubre de 2026</a:t>
+              <a:t>Por unidades hasta el fin del período. Unidad 1 cerrada el 27 de octubre de 2026</a:t>
             </a:r>
             <a:endParaRPr lang="en-US" sz="1300" dirty="0"/>
           </a:p>
@@ -5638,7 +5638,7 @@
                   <a:schemeClr val="accent2"/>
                 </a:solidFill>
               </a:rPr>
-              <a:t>Analizar y diseñar el SCA de RBG documentando cuatro casos de uso de nivel 0 con su trazabilidad, clases y secuencias, y evaluando su calidad con la lista IREB, para mejorar el registro de asistencia y el cálculo de horas hasta el 27 de octubre de 2026.</a:t>
+              <a:t>Analizar y diseñar el SCA de RBG completo, modelando los 9 casos de uso del SRS con su trazabilidad, clases y secuencias y evaluando sus requisitos con la lista IREB, antes de que termine el período académico.</a:t>
             </a:r>
             <a:endParaRPr lang="en-US" sz="1500" dirty="0"/>
           </a:p>
